--- a/curso/pptx/S32.pptx
+++ b/curso/pptx/S32.pptx
@@ -6988,7 +6988,7 @@
                 </a:solidFill>
                 <a:latin typeface="Nunito Sans"/>
               </a:rPr>
-              <a:t>Debe resumir lo </a:t>
+              <a:t>它应该概括新闻里</a:t>
             </a:r>
             <a:r>
               <a:rPr sz="2800" b="1">
@@ -6997,7 +6997,7 @@
                 </a:solidFill>
                 <a:latin typeface="Nunito Sans"/>
               </a:rPr>
-              <a:t>importante</a:t>
+              <a:t>重要</a:t>
             </a:r>
             <a:r>
               <a:rPr sz="2800" b="0">
@@ -7006,7 +7006,7 @@
                 </a:solidFill>
                 <a:latin typeface="Nunito Sans"/>
               </a:rPr>
-              <a:t> de la noticia</a:t>
+              <a:t>的内容</a:t>
             </a:r>
           </a:p>
           <a:p>
@@ -7031,7 +7031,7 @@
                 </a:solidFill>
                 <a:latin typeface="Nunito Sans"/>
               </a:rPr>
-              <a:t>Mucha gente solo lee el titular, no la noticia entera</a:t>
+              <a:t>很多人只读标题，不读整条新闻</a:t>
             </a:r>
           </a:p>
           <a:p>
@@ -7056,7 +7056,7 @@
                 </a:solidFill>
                 <a:latin typeface="Nunito Sans"/>
               </a:rPr>
-              <a:t>Por eso un titular puede engañar sin mentir del todo</a:t>
+              <a:t>所以一个标题可以不完全说谎也能骗人</a:t>
             </a:r>
           </a:p>
         </p:txBody>
@@ -7290,7 +7290,7 @@
                 </a:solidFill>
                 <a:latin typeface="Nunito Sans"/>
               </a:rPr>
-              <a:t>Muchas webs ganan dinero con cada clic y cada anuncio</a:t>
+              <a:t>很多网站每有一次点击和一则广告就赚钱</a:t>
             </a:r>
           </a:p>
           <a:p>
@@ -7315,7 +7315,7 @@
                 </a:solidFill>
                 <a:latin typeface="Nunito Sans"/>
               </a:rPr>
-              <a:t>Promete mucho; la noticia cuenta poco</a:t>
+              <a:t>承诺很多；新闻讲得很少</a:t>
             </a:r>
           </a:p>
           <a:p>
@@ -7340,7 +7340,7 @@
                 </a:solidFill>
                 <a:latin typeface="Nunito Sans"/>
               </a:rPr>
-              <a:t>Busca curiosidad, miedo o enfado</a:t>
+              <a:t>利用好奇、恐惧或者愤怒</a:t>
             </a:r>
           </a:p>
         </p:txBody>
@@ -7531,7 +7531,7 @@
                 </a:solidFill>
                 <a:latin typeface="Nunito Sans"/>
               </a:rPr>
-              <a:t>Esconde el dato:</a:t>
+              <a:t>隐藏关键信息：</a:t>
             </a:r>
             <a:r>
               <a:rPr sz="2800" b="0">
@@ -7540,7 +7540,7 @@
                 </a:solidFill>
                 <a:latin typeface="Nunito Sans"/>
               </a:rPr>
-              <a:t> «No creerás lo que pasó»</a:t>
+              <a:t>“你不会相信发生了什么”</a:t>
             </a:r>
           </a:p>
           <a:p>
@@ -7565,7 +7565,7 @@
                 </a:solidFill>
                 <a:latin typeface="Nunito Sans"/>
               </a:rPr>
-              <a:t>Exagera:</a:t>
+              <a:t>夸大：</a:t>
             </a:r>
             <a:r>
               <a:rPr sz="2800" b="0">
@@ -7574,7 +7574,7 @@
                 </a:solidFill>
                 <a:latin typeface="Nunito Sans"/>
               </a:rPr>
-              <a:t> «increíble», «brutal», «impactante»</a:t>
+              <a:t>“难以置信”“太猛了”“震惊”</a:t>
             </a:r>
           </a:p>
           <a:p>
@@ -7599,7 +7599,7 @@
                 </a:solidFill>
                 <a:latin typeface="Nunito Sans"/>
               </a:rPr>
-              <a:t>MAYÚSCULAS</a:t>
+              <a:t>大写字母</a:t>
             </a:r>
             <a:r>
               <a:rPr sz="2800" b="0">
@@ -7608,7 +7608,7 @@
                 </a:solidFill>
                 <a:latin typeface="Nunito Sans"/>
               </a:rPr>
-              <a:t> y muchos signos de exclamación</a:t>
+              <a:t>和很多感叹号</a:t>
             </a:r>
           </a:p>
           <a:p>
@@ -7633,7 +7633,7 @@
                 </a:solidFill>
                 <a:latin typeface="Nunito Sans"/>
               </a:rPr>
-              <a:t>Promete un secreto:</a:t>
+              <a:t>承诺一个秘密：</a:t>
             </a:r>
             <a:r>
               <a:rPr sz="2800" b="0">
@@ -7642,7 +7642,7 @@
                 </a:solidFill>
                 <a:latin typeface="Nunito Sans"/>
               </a:rPr>
-              <a:t> «lo que nadie te cuenta»</a:t>
+              <a:t>“没有人告诉你的事”</a:t>
             </a:r>
           </a:p>
           <a:p>
@@ -7667,7 +7667,7 @@
                 </a:solidFill>
                 <a:latin typeface="Nunito Sans"/>
               </a:rPr>
-              <a:t>Hace una pregunta</a:t>
+              <a:t>提出一个问题</a:t>
             </a:r>
             <a:r>
               <a:rPr sz="2800" b="0">
@@ -7676,7 +7676,7 @@
                 </a:solidFill>
                 <a:latin typeface="Nunito Sans"/>
               </a:rPr>
-              <a:t> que la noticia contesta con un «no»</a:t>
+              <a:t>，而新闻的回答是“不”</a:t>
             </a:r>
           </a:p>
         </p:txBody>
